--- a/Clients/HMG/presentation/Technijian for The Holman Group - First Meeting Deck.pptx
+++ b/Clients/HMG/presentation/Technijian for The Holman Group - First Meeting Deck.pptx
@@ -952,7 +952,7 @@
           <a:p>
             <a:r>
               <a:rPr lang="en-US" dirty="0"/>
-              <a:t>Earn the right to keep talking — 20 seconds, not a history lesson. The four proof points that matter to a fellow technician: (1) 25+ years, we're not going anywhere; (2) the POD model — a named team that learns YOUR environment, not a different stranger every ticket; (3) security-first, CISSP-led, our own 24/7 SOC; (4) AI-forward, we actually build, not just resell. Land the pod model hardest — it's the antidote to every bad MSP experience he's had. If he's quiet, ask: "Have you worked with an outside IT shop before — what did you like or hate about it?"</a:t>
+              <a:t>Earn the right to keep talking — 20 seconds, not a history lesson. The four proof points that matter to a fellow technician: (1) 25+ years, we're not going anywhere; (2) the POD model — a named team that learns YOUR environment, not a different stranger every ticket; (3) security-first, CISSP-led, our own 24/7 MDR; (4) AI-forward, we actually build, not just resell. Land the pod model hardest — it's the antidote to every bad MSP experience he's had. If he's quiet, ask: "Have you worked with an outside IT shop before — what did you like or hate about it?"</a:t>
             </a:r>
             <a:endParaRPr lang="en-US" dirty="0"/>
           </a:p>
@@ -7406,7 +7406,7 @@
                 <a:ea typeface="Arial" pitchFamily="34" charset="-122"/>
                 <a:cs typeface="Arial" pitchFamily="34" charset="-120"/>
               </a:rPr>
-              <a:t>CISSP-led, with our own 24/7 Security Operations Center and CrowdStrike / Huntress-grade tooling. Security isn't an add-on line item for us — it's how we run everything.</a:t>
+              <a:t>CISSP-led, delivering 24/7 managed detection &amp; response — our My Jian SIEM correlating across CrowdStrike/Huntress MDR, with our analysts triaging. Security isn't an add-on line item for us — it's how we run everything.</a:t>
             </a:r>
             <a:endParaRPr lang="en-US" sz="1150" dirty="0"/>
           </a:p>
@@ -8290,7 +8290,7 @@
                 <a:ea typeface="Arial" pitchFamily="34" charset="-122"/>
                 <a:cs typeface="Arial" pitchFamily="34" charset="-120"/>
               </a:rPr>
-              <a:t>A mid-market org with on-prem servers and a small internal team carrying the pager. Scope: a 24/7 SOC overlay plus after-hours help-desk so the in-house staff got nights and weekends back, with patch and backup discipline tightened across the server estate.</a:t>
+              <a:t>A mid-market org with on-prem servers and a small internal team carrying the pager. Scope: a 24/7 MDR overlay plus after-hours help-desk so the in-house staff got nights and weekends back, with patch and backup discipline tightened across the server estate.</a:t>
             </a:r>
             <a:endParaRPr lang="en-US" sz="1100" dirty="0"/>
           </a:p>
@@ -10209,7 +10209,7 @@
                 <a:ea typeface="Arial" pitchFamily="34" charset="-122"/>
                 <a:cs typeface="Arial" pitchFamily="34" charset="-120"/>
               </a:rPr>
-              <a:t>24/7 SOC, after-hours and weekend response, surge bandwidth for projects, PTO coverage — the things a single in-house team simply can't staff alone.</a:t>
+              <a:t>24/7 MDR, after-hours and weekend response, surge bandwidth for projects, PTO coverage — the things a single in-house team simply can't staff alone.</a:t>
             </a:r>
             <a:endParaRPr lang="en-US" sz="1050" dirty="0"/>
           </a:p>
@@ -11095,7 +11095,7 @@
                 <a:ea typeface="Arial" pitchFamily="34" charset="-122"/>
                 <a:cs typeface="Arial" pitchFamily="34" charset="-120"/>
               </a:rPr>
-              <a:t>A 24/7 SOC, EDR on every endpoint and server, email security, and identity hardening — plus HIPAA / Knox-Keene / URAC evidence and risk assessments. The coverage and audit trail one team can't sustain alone.</a:t>
+              <a:t>A 24/7 MDR, EDR on every endpoint and server, email security, and identity hardening — plus HIPAA / Knox-Keene / URAC evidence and risk assessments. The coverage and audit trail one team can't sustain alone.</a:t>
             </a:r>
             <a:endParaRPr lang="en-US" sz="1150" dirty="0"/>
           </a:p>
@@ -12731,7 +12731,7 @@
                 <a:ea typeface="Arial" pitchFamily="34" charset="-122"/>
                 <a:cs typeface="Arial" pitchFamily="34" charset="-120"/>
               </a:rPr>
-              <a:t>24/7 SOC &amp; response</a:t>
+              <a:t>24/7 MDR &amp; response</a:t>
             </a:r>
             <a:endParaRPr lang="en-US" sz="1500" dirty="0"/>
           </a:p>
